--- a/deck/rialto-deck.pptx
+++ b/deck/rialto-deck.pptx
@@ -4212,7 +4212,7 @@
                 <a:ea typeface="Calibri" pitchFamily="34" charset="-122"/>
                 <a:cs typeface="Calibri" pitchFamily="34" charset="-120"/>
               </a:rPr>
-              <a:t>TEAM · INDIVIDUAL · INDIA · STUDENT · FULL-TIME</a:t>
+              <a:t>TEAM · ASHWIN GOYAL · INDIVIDUAL · INDIA · STUDENT · FULL-TIME</a:t>
             </a:r>
             <a:endParaRPr lang="en-US" sz="1100" dirty="0"/>
           </a:p>
@@ -4251,7 +4251,7 @@
                 <a:ea typeface="Arial" pitchFamily="34" charset="-122"/>
                 <a:cs typeface="Arial" pitchFamily="34" charset="-120"/>
               </a:rPr>
-              <a:t>Ashwin Goyal.</a:t>
+              <a:t>I build systems a stranger</a:t>
             </a:r>
             <a:endParaRPr lang="en-US" sz="4000" dirty="0"/>
           </a:p>
@@ -4268,7 +4268,7 @@
                 <a:ea typeface="Arial" pitchFamily="34" charset="-122"/>
                 <a:cs typeface="Arial" pitchFamily="34" charset="-120"/>
               </a:rPr>
-              <a:t>One person, nine days.</a:t>
+              <a:t>can re-derive. Then I attack them.</a:t>
             </a:r>
             <a:endParaRPr lang="en-US" sz="4000" dirty="0"/>
           </a:p>
@@ -4282,8 +4282,47 @@
         </p:nvSpPr>
         <p:spPr>
           <a:xfrm>
-            <a:off x="640080" y="3200400"/>
-            <a:ext cx="7315200" cy="1097280"/>
+            <a:off x="640080" y="2788920"/>
+            <a:ext cx="3840480" cy="384048"/>
+          </a:xfrm>
+          <a:prstGeom prst="rect">
+            <a:avLst/>
+          </a:prstGeom>
+          <a:noFill/>
+          <a:ln/>
+        </p:spPr>
+        <p:txBody>
+          <a:bodyPr wrap="square" lIns="0" tIns="0" rIns="0" bIns="0" rtlCol="0" anchor="ctr"/>
+          <a:lstStyle/>
+          <a:p>
+            <a:pPr indent="0" marL="0">
+              <a:buNone/>
+            </a:pPr>
+            <a:r>
+              <a:rPr lang="en-US" sz="1700" b="1" dirty="0">
+                <a:solidFill>
+                  <a:srgbClr val="FFFFFF"/>
+                </a:solidFill>
+                <a:latin typeface="Arial" pitchFamily="34" charset="0"/>
+                <a:ea typeface="Arial" pitchFamily="34" charset="-122"/>
+                <a:cs typeface="Arial" pitchFamily="34" charset="-120"/>
+              </a:rPr>
+              <a:t>Germline</a:t>
+            </a:r>
+            <a:endParaRPr lang="en-US" sz="1700" dirty="0"/>
+          </a:p>
+        </p:txBody>
+      </p:sp>
+      <p:sp>
+        <p:nvSpPr>
+          <p:cNvPr id="5" name="Text 3"/>
+          <p:cNvSpPr txBox="1"/>
+          <p:nvPr/>
+        </p:nvSpPr>
+        <p:spPr>
+          <a:xfrm>
+            <a:off x="640080" y="3172968"/>
+            <a:ext cx="3840480" cy="502920"/>
           </a:xfrm>
           <a:prstGeom prst="rect">
             <a:avLst/>
@@ -4299,52 +4338,263 @@
               <a:buNone/>
             </a:pPr>
             <a:r>
-              <a:rPr lang="en-US" sz="1800" dirty="0">
-                <a:solidFill>
-                  <a:srgbClr val="C3C2B7"/>
+              <a:rPr lang="en-US" sz="1050" dirty="0">
+                <a:solidFill>
+                  <a:srgbClr val="8D8B82"/>
                 </a:solidFill>
                 <a:latin typeface="Calibri" pitchFamily="34" charset="0"/>
                 <a:ea typeface="Calibri" pitchFamily="34" charset="-122"/>
                 <a:cs typeface="Calibri" pitchFamily="34" charset="-120"/>
               </a:rPr>
-              <a:t>1,584 lines of Solidity across six contracts. 71 passing tests. A 259-day backtest on ECB data. An adversarial review that found and fixed a failure mode worth 37.8% of a pool's book. Source-verified deployment, a settled invoice, a settled forward, a reproducible demo video.</a:t>
-            </a:r>
-            <a:endParaRPr lang="en-US" sz="1800" dirty="0"/>
-          </a:p>
+              <a:t>Verifiable AI-configuration tuning, live on 0G mainnet — every step recorded on-chain.</a:t>
+            </a:r>
+            <a:endParaRPr lang="en-US" sz="1050" dirty="0"/>
+          </a:p>
+        </p:txBody>
+      </p:sp>
+      <p:sp>
+        <p:nvSpPr>
+          <p:cNvPr id="6" name="Text 4"/>
+          <p:cNvSpPr txBox="1"/>
+          <p:nvPr/>
+        </p:nvSpPr>
+        <p:spPr>
+          <a:xfrm>
+            <a:off x="4709160" y="2788920"/>
+            <a:ext cx="3840480" cy="384048"/>
+          </a:xfrm>
+          <a:prstGeom prst="rect">
+            <a:avLst/>
+          </a:prstGeom>
+          <a:noFill/>
+          <a:ln/>
+        </p:spPr>
+        <p:txBody>
+          <a:bodyPr wrap="square" lIns="0" tIns="0" rIns="0" bIns="0" rtlCol="0" anchor="ctr"/>
+          <a:lstStyle/>
           <a:p>
             <a:pPr indent="0" marL="0">
               <a:buNone/>
             </a:pPr>
-            <a:endParaRPr lang="en-US" sz="1800" dirty="0"/>
-          </a:p>
+            <a:r>
+              <a:rPr lang="en-US" sz="1700" b="1" dirty="0">
+                <a:solidFill>
+                  <a:srgbClr val="FFFFFF"/>
+                </a:solidFill>
+                <a:latin typeface="Arial" pitchFamily="34" charset="0"/>
+                <a:ea typeface="Arial" pitchFamily="34" charset="-122"/>
+                <a:cs typeface="Arial" pitchFamily="34" charset="-120"/>
+              </a:rPr>
+              <a:t>BIP 360 conformance</a:t>
+            </a:r>
+            <a:endParaRPr lang="en-US" sz="1700" dirty="0"/>
+          </a:p>
+        </p:txBody>
+      </p:sp>
+      <p:sp>
+        <p:nvSpPr>
+          <p:cNvPr id="7" name="Text 5"/>
+          <p:cNvSpPr txBox="1"/>
+          <p:nvPr/>
+        </p:nvSpPr>
+        <p:spPr>
+          <a:xfrm>
+            <a:off x="4709160" y="3172968"/>
+            <a:ext cx="3840480" cy="502920"/>
+          </a:xfrm>
+          <a:prstGeom prst="rect">
+            <a:avLst/>
+          </a:prstGeom>
+          <a:noFill/>
+          <a:ln/>
+        </p:spPr>
+        <p:txBody>
+          <a:bodyPr wrap="square" lIns="0" tIns="0" rIns="0" bIns="0" rtlCol="0" anchor="t"/>
+          <a:lstStyle/>
           <a:p>
             <a:pPr indent="0" marL="0">
               <a:buNone/>
             </a:pPr>
             <a:r>
-              <a:rPr lang="en-US" sz="1800" dirty="0">
-                <a:solidFill>
-                  <a:srgbClr val="C3C2B7"/>
+              <a:rPr lang="en-US" sz="1050" dirty="0">
+                <a:solidFill>
+                  <a:srgbClr val="8D8B82"/>
                 </a:solidFill>
                 <a:latin typeface="Calibri" pitchFamily="34" charset="0"/>
                 <a:ea typeface="Calibri" pitchFamily="34" charset="-122"/>
                 <a:cs typeface="Calibri" pitchFamily="34" charset="-120"/>
               </a:rPr>
-              <a:t>Before this: Drape, a storefront built for an XPRIZE submission, and its postmortem — "built for a judge, not a shop". Rialto was built the other way round: measure first.</a:t>
-            </a:r>
-            <a:endParaRPr lang="en-US" sz="1800" dirty="0"/>
-          </a:p>
-        </p:txBody>
-      </p:sp>
-      <p:sp>
-        <p:nvSpPr>
-          <p:cNvPr id="5" name="Text 3"/>
-          <p:cNvSpPr txBox="1"/>
-          <p:nvPr/>
-        </p:nvSpPr>
-        <p:spPr>
-          <a:xfrm>
-            <a:off x="640080" y="4526280"/>
+              <a:t>From-scratch implementation vs the official reference: 13 vectors, 2,000 random trees, two real gaps found in the reference.</a:t>
+            </a:r>
+            <a:endParaRPr lang="en-US" sz="1050" dirty="0"/>
+          </a:p>
+        </p:txBody>
+      </p:sp>
+      <p:sp>
+        <p:nvSpPr>
+          <p:cNvPr id="8" name="Text 6"/>
+          <p:cNvSpPr txBox="1"/>
+          <p:nvPr/>
+        </p:nvSpPr>
+        <p:spPr>
+          <a:xfrm>
+            <a:off x="640080" y="3703320"/>
+            <a:ext cx="3840480" cy="384048"/>
+          </a:xfrm>
+          <a:prstGeom prst="rect">
+            <a:avLst/>
+          </a:prstGeom>
+          <a:noFill/>
+          <a:ln/>
+        </p:spPr>
+        <p:txBody>
+          <a:bodyPr wrap="square" lIns="0" tIns="0" rIns="0" bIns="0" rtlCol="0" anchor="ctr"/>
+          <a:lstStyle/>
+          <a:p>
+            <a:pPr indent="0" marL="0">
+              <a:buNone/>
+            </a:pPr>
+            <a:r>
+              <a:rPr lang="en-US" sz="1700" b="1" dirty="0">
+                <a:solidFill>
+                  <a:srgbClr val="FFFFFF"/>
+                </a:solidFill>
+                <a:latin typeface="Arial" pitchFamily="34" charset="0"/>
+                <a:ea typeface="Arial" pitchFamily="34" charset="-122"/>
+                <a:cs typeface="Arial" pitchFamily="34" charset="-120"/>
+              </a:rPr>
+              <a:t>USDC/CCTP · Circle Wallets</a:t>
+            </a:r>
+            <a:endParaRPr lang="en-US" sz="1700" dirty="0"/>
+          </a:p>
+        </p:txBody>
+      </p:sp>
+      <p:sp>
+        <p:nvSpPr>
+          <p:cNvPr id="9" name="Text 7"/>
+          <p:cNvSpPr txBox="1"/>
+          <p:nvPr/>
+        </p:nvSpPr>
+        <p:spPr>
+          <a:xfrm>
+            <a:off x="640080" y="4087368"/>
+            <a:ext cx="3840480" cy="502920"/>
+          </a:xfrm>
+          <a:prstGeom prst="rect">
+            <a:avLst/>
+          </a:prstGeom>
+          <a:noFill/>
+          <a:ln/>
+        </p:spPr>
+        <p:txBody>
+          <a:bodyPr wrap="square" lIns="0" tIns="0" rIns="0" bIns="0" rtlCol="0" anchor="t"/>
+          <a:lstStyle/>
+          <a:p>
+            <a:pPr indent="0" marL="0">
+              <a:buNone/>
+            </a:pPr>
+            <a:r>
+              <a:rPr lang="en-US" sz="1050" dirty="0">
+                <a:solidFill>
+                  <a:srgbClr val="8D8B82"/>
+                </a:solidFill>
+                <a:latin typeface="Calibri" pitchFamily="34" charset="0"/>
+                <a:ea typeface="Calibri" pitchFamily="34" charset="-122"/>
+                <a:cs typeface="Calibri" pitchFamily="34" charset="-120"/>
+              </a:rPr>
+              <a:t>Already shipped: proofflow (USDC, CCTP, Arcium MPC, live) and an agent on Circle Developer Controlled Wallets.</a:t>
+            </a:r>
+            <a:endParaRPr lang="en-US" sz="1050" dirty="0"/>
+          </a:p>
+        </p:txBody>
+      </p:sp>
+      <p:sp>
+        <p:nvSpPr>
+          <p:cNvPr id="10" name="Text 8"/>
+          <p:cNvSpPr txBox="1"/>
+          <p:nvPr/>
+        </p:nvSpPr>
+        <p:spPr>
+          <a:xfrm>
+            <a:off x="4709160" y="3703320"/>
+            <a:ext cx="3840480" cy="384048"/>
+          </a:xfrm>
+          <a:prstGeom prst="rect">
+            <a:avLst/>
+          </a:prstGeom>
+          <a:noFill/>
+          <a:ln/>
+        </p:spPr>
+        <p:txBody>
+          <a:bodyPr wrap="square" lIns="0" tIns="0" rIns="0" bIns="0" rtlCol="0" anchor="ctr"/>
+          <a:lstStyle/>
+          <a:p>
+            <a:pPr indent="0" marL="0">
+              <a:buNone/>
+            </a:pPr>
+            <a:r>
+              <a:rPr lang="en-US" sz="1700" b="1" dirty="0">
+                <a:solidFill>
+                  <a:srgbClr val="FFFFFF"/>
+                </a:solidFill>
+                <a:latin typeface="Arial" pitchFamily="34" charset="0"/>
+                <a:ea typeface="Arial" pitchFamily="34" charset="-122"/>
+                <a:cs typeface="Arial" pitchFamily="34" charset="-120"/>
+              </a:rPr>
+              <a:t>Rialto, nine days</a:t>
+            </a:r>
+            <a:endParaRPr lang="en-US" sz="1700" dirty="0"/>
+          </a:p>
+        </p:txBody>
+      </p:sp>
+      <p:sp>
+        <p:nvSpPr>
+          <p:cNvPr id="11" name="Text 9"/>
+          <p:cNvSpPr txBox="1"/>
+          <p:nvPr/>
+        </p:nvSpPr>
+        <p:spPr>
+          <a:xfrm>
+            <a:off x="4709160" y="4087368"/>
+            <a:ext cx="3840480" cy="502920"/>
+          </a:xfrm>
+          <a:prstGeom prst="rect">
+            <a:avLst/>
+          </a:prstGeom>
+          <a:noFill/>
+          <a:ln/>
+        </p:spPr>
+        <p:txBody>
+          <a:bodyPr wrap="square" lIns="0" tIns="0" rIns="0" bIns="0" rtlCol="0" anchor="t"/>
+          <a:lstStyle/>
+          <a:p>
+            <a:pPr indent="0" marL="0">
+              <a:buNone/>
+            </a:pPr>
+            <a:r>
+              <a:rPr lang="en-US" sz="1050" dirty="0">
+                <a:solidFill>
+                  <a:srgbClr val="8D8B82"/>
+                </a:solidFill>
+                <a:latin typeface="Calibri" pitchFamily="34" charset="0"/>
+                <a:ea typeface="Calibri" pitchFamily="34" charset="-122"/>
+                <a:cs typeface="Calibri" pitchFamily="34" charset="-120"/>
+              </a:rPr>
+              <a:t>Six verified contracts, 71 tests, a 259-day backtest, an adversarial review, a settled invoice and forward, a demo video.</a:t>
+            </a:r>
+            <a:endParaRPr lang="en-US" sz="1050" dirty="0"/>
+          </a:p>
+        </p:txBody>
+      </p:sp>
+      <p:sp>
+        <p:nvSpPr>
+          <p:cNvPr id="12" name="Text 10"/>
+          <p:cNvSpPr txBox="1"/>
+          <p:nvPr/>
+        </p:nvSpPr>
+        <p:spPr>
+          <a:xfrm>
+            <a:off x="640080" y="4572000"/>
             <a:ext cx="7863840" cy="320040"/>
           </a:xfrm>
           <a:prstGeom prst="rect">
@@ -4361,7 +4611,7 @@
               <a:buNone/>
             </a:pPr>
             <a:r>
-              <a:rPr lang="en-US" sz="1100" dirty="0">
+              <a:rPr lang="en-US" sz="1050" dirty="0">
                 <a:solidFill>
                   <a:srgbClr val="8D8B82"/>
                 </a:solidFill>
@@ -4369,9 +4619,9 @@
                 <a:ea typeface="Courier New" pitchFamily="34" charset="-122"/>
                 <a:cs typeface="Courier New" pitchFamily="34" charset="-120"/>
               </a:rPr>
-              <a:t>rialto-arc.netlify.app  ·  github.com/let-the-dreamers-rise/rialto</a:t>
-            </a:r>
-            <a:endParaRPr lang="en-US" sz="1100" dirty="0"/>
+              <a:t>github.com/let-the-dreamers-rise · 123 repositories · 901 contributions in the last year · rialto-arc.netlify.app</a:t>
+            </a:r>
+            <a:endParaRPr lang="en-US" sz="1050" dirty="0"/>
           </a:p>
         </p:txBody>
       </p:sp>

--- a/deck/rialto-deck.pptx
+++ b/deck/rialto-deck.pptx
@@ -4187,7 +4187,7 @@
         </p:nvSpPr>
         <p:spPr>
           <a:xfrm>
-            <a:off x="640080" y="640080"/>
+            <a:off x="640080" y="502920"/>
             <a:ext cx="7863840" cy="274320"/>
           </a:xfrm>
           <a:prstGeom prst="rect">
@@ -4226,8 +4226,8 @@
         </p:nvSpPr>
         <p:spPr>
           <a:xfrm>
-            <a:off x="640080" y="1234440"/>
-            <a:ext cx="7863840" cy="1828800"/>
+            <a:off x="640080" y="868680"/>
+            <a:ext cx="7863840" cy="914400"/>
           </a:xfrm>
           <a:prstGeom prst="rect">
             <a:avLst/>
@@ -4243,7 +4243,7 @@
               <a:buNone/>
             </a:pPr>
             <a:r>
-              <a:rPr lang="en-US" sz="4000" b="1" dirty="0">
+              <a:rPr lang="en-US" sz="2700" b="1" dirty="0">
                 <a:solidFill>
                   <a:srgbClr val="FFFFFF"/>
                 </a:solidFill>
@@ -4251,16 +4251,16 @@
                 <a:ea typeface="Arial" pitchFamily="34" charset="-122"/>
                 <a:cs typeface="Arial" pitchFamily="34" charset="-120"/>
               </a:rPr>
-              <a:t>I build systems a stranger</a:t>
-            </a:r>
-            <a:endParaRPr lang="en-US" sz="4000" dirty="0"/>
-          </a:p>
-          <a:p>
-            <a:pPr indent="0" marL="0">
-              <a:buNone/>
-            </a:pPr>
-            <a:r>
-              <a:rPr lang="en-US" sz="4000" b="1" dirty="0">
+              <a:t>I build systems a stranger can re-derive.</a:t>
+            </a:r>
+            <a:endParaRPr lang="en-US" sz="2700" dirty="0"/>
+          </a:p>
+          <a:p>
+            <a:pPr indent="0" marL="0">
+              <a:buNone/>
+            </a:pPr>
+            <a:r>
+              <a:rPr lang="en-US" sz="2700" b="1" dirty="0">
                 <a:solidFill>
                   <a:srgbClr val="FFFFFF"/>
                 </a:solidFill>
@@ -4268,9 +4268,9 @@
                 <a:ea typeface="Arial" pitchFamily="34" charset="-122"/>
                 <a:cs typeface="Arial" pitchFamily="34" charset="-120"/>
               </a:rPr>
-              <a:t>can re-derive. Then I attack them.</a:t>
-            </a:r>
-            <a:endParaRPr lang="en-US" sz="4000" dirty="0"/>
+              <a:t>Then I attack them.</a:t>
+            </a:r>
+            <a:endParaRPr lang="en-US" sz="2700" dirty="0"/>
           </a:p>
         </p:txBody>
       </p:sp>
@@ -4282,8 +4282,8 @@
         </p:nvSpPr>
         <p:spPr>
           <a:xfrm>
-            <a:off x="640080" y="2788920"/>
-            <a:ext cx="3840480" cy="384048"/>
+            <a:off x="640080" y="1874520"/>
+            <a:ext cx="4572000" cy="228600"/>
           </a:xfrm>
           <a:prstGeom prst="rect">
             <a:avLst/>
@@ -4299,7 +4299,514 @@
               <a:buNone/>
             </a:pPr>
             <a:r>
-              <a:rPr lang="en-US" sz="1700" b="1" dirty="0">
+              <a:rPr lang="en-US" sz="950" b="1" spc="300" kern="0" dirty="0">
+                <a:solidFill>
+                  <a:srgbClr val="6B6A64"/>
+                </a:solidFill>
+                <a:latin typeface="Calibri" pitchFamily="34" charset="0"/>
+                <a:ea typeface="Calibri" pitchFamily="34" charset="-122"/>
+                <a:cs typeface="Calibri" pitchFamily="34" charset="-120"/>
+              </a:rPr>
+              <a:t>SHIPPED BEFORE RIALTO</a:t>
+            </a:r>
+            <a:endParaRPr lang="en-US" sz="950" dirty="0"/>
+          </a:p>
+        </p:txBody>
+      </p:sp>
+      <p:sp>
+        <p:nvSpPr>
+          <p:cNvPr id="5" name="Text 3"/>
+          <p:cNvSpPr txBox="1"/>
+          <p:nvPr/>
+        </p:nvSpPr>
+        <p:spPr>
+          <a:xfrm>
+            <a:off x="640080" y="2148840"/>
+            <a:ext cx="1325880" cy="438912"/>
+          </a:xfrm>
+          <a:prstGeom prst="rect">
+            <a:avLst/>
+          </a:prstGeom>
+          <a:noFill/>
+          <a:ln/>
+        </p:spPr>
+        <p:txBody>
+          <a:bodyPr wrap="square" lIns="0" tIns="0" rIns="0" bIns="0" rtlCol="0" anchor="t"/>
+          <a:lstStyle/>
+          <a:p>
+            <a:pPr indent="0" marL="0">
+              <a:buNone/>
+            </a:pPr>
+            <a:r>
+              <a:rPr lang="en-US" sz="1050" b="1" dirty="0">
+                <a:solidFill>
+                  <a:srgbClr val="FFFFFF"/>
+                </a:solidFill>
+                <a:latin typeface="Calibri" pitchFamily="34" charset="0"/>
+                <a:ea typeface="Calibri" pitchFamily="34" charset="-122"/>
+                <a:cs typeface="Calibri" pitchFamily="34" charset="-120"/>
+              </a:rPr>
+              <a:t>Germline</a:t>
+            </a:r>
+            <a:endParaRPr lang="en-US" sz="1050" dirty="0"/>
+          </a:p>
+        </p:txBody>
+      </p:sp>
+      <p:sp>
+        <p:nvSpPr>
+          <p:cNvPr id="6" name="Text 4"/>
+          <p:cNvSpPr txBox="1"/>
+          <p:nvPr/>
+        </p:nvSpPr>
+        <p:spPr>
+          <a:xfrm>
+            <a:off x="2011680" y="2148840"/>
+            <a:ext cx="3200400" cy="438912"/>
+          </a:xfrm>
+          <a:prstGeom prst="rect">
+            <a:avLst/>
+          </a:prstGeom>
+          <a:noFill/>
+          <a:ln/>
+        </p:spPr>
+        <p:txBody>
+          <a:bodyPr wrap="square" lIns="0" tIns="0" rIns="0" bIns="0" rtlCol="0" anchor="t"/>
+          <a:lstStyle/>
+          <a:p>
+            <a:pPr indent="0" marL="0">
+              <a:buNone/>
+            </a:pPr>
+            <a:r>
+              <a:rPr lang="en-US" sz="950" dirty="0">
+                <a:solidFill>
+                  <a:srgbClr val="C3C2B7"/>
+                </a:solidFill>
+                <a:latin typeface="Calibri" pitchFamily="34" charset="0"/>
+                <a:ea typeface="Calibri" pitchFamily="34" charset="-122"/>
+                <a:cs typeface="Calibri" pitchFamily="34" charset="-120"/>
+              </a:rPr>
+              <a:t>Verifiable AI-configuration tuning, live on 0G mainnet; every step recorded on-chain.</a:t>
+            </a:r>
+            <a:endParaRPr lang="en-US" sz="950" dirty="0"/>
+          </a:p>
+        </p:txBody>
+      </p:sp>
+      <p:sp>
+        <p:nvSpPr>
+          <p:cNvPr id="7" name="Text 5"/>
+          <p:cNvSpPr txBox="1"/>
+          <p:nvPr/>
+        </p:nvSpPr>
+        <p:spPr>
+          <a:xfrm>
+            <a:off x="640080" y="2606040"/>
+            <a:ext cx="1325880" cy="438912"/>
+          </a:xfrm>
+          <a:prstGeom prst="rect">
+            <a:avLst/>
+          </a:prstGeom>
+          <a:noFill/>
+          <a:ln/>
+        </p:spPr>
+        <p:txBody>
+          <a:bodyPr wrap="square" lIns="0" tIns="0" rIns="0" bIns="0" rtlCol="0" anchor="t"/>
+          <a:lstStyle/>
+          <a:p>
+            <a:pPr indent="0" marL="0">
+              <a:buNone/>
+            </a:pPr>
+            <a:r>
+              <a:rPr lang="en-US" sz="1050" b="1" dirty="0">
+                <a:solidFill>
+                  <a:srgbClr val="FFFFFF"/>
+                </a:solidFill>
+                <a:latin typeface="Calibri" pitchFamily="34" charset="0"/>
+                <a:ea typeface="Calibri" pitchFamily="34" charset="-122"/>
+                <a:cs typeface="Calibri" pitchFamily="34" charset="-120"/>
+              </a:rPr>
+              <a:t>BIP 360 conformance</a:t>
+            </a:r>
+            <a:endParaRPr lang="en-US" sz="1050" dirty="0"/>
+          </a:p>
+        </p:txBody>
+      </p:sp>
+      <p:sp>
+        <p:nvSpPr>
+          <p:cNvPr id="8" name="Text 6"/>
+          <p:cNvSpPr txBox="1"/>
+          <p:nvPr/>
+        </p:nvSpPr>
+        <p:spPr>
+          <a:xfrm>
+            <a:off x="2011680" y="2606040"/>
+            <a:ext cx="3200400" cy="438912"/>
+          </a:xfrm>
+          <a:prstGeom prst="rect">
+            <a:avLst/>
+          </a:prstGeom>
+          <a:noFill/>
+          <a:ln/>
+        </p:spPr>
+        <p:txBody>
+          <a:bodyPr wrap="square" lIns="0" tIns="0" rIns="0" bIns="0" rtlCol="0" anchor="t"/>
+          <a:lstStyle/>
+          <a:p>
+            <a:pPr indent="0" marL="0">
+              <a:buNone/>
+            </a:pPr>
+            <a:r>
+              <a:rPr lang="en-US" sz="950" dirty="0">
+                <a:solidFill>
+                  <a:srgbClr val="C3C2B7"/>
+                </a:solidFill>
+                <a:latin typeface="Calibri" pitchFamily="34" charset="0"/>
+                <a:ea typeface="Calibri" pitchFamily="34" charset="-122"/>
+                <a:cs typeface="Calibri" pitchFamily="34" charset="-120"/>
+              </a:rPr>
+              <a:t>From-scratch implementation vs the official reference, 13 vectors and 2,000 random trees: two real gaps found in the reference.</a:t>
+            </a:r>
+            <a:endParaRPr lang="en-US" sz="950" dirty="0"/>
+          </a:p>
+        </p:txBody>
+      </p:sp>
+      <p:sp>
+        <p:nvSpPr>
+          <p:cNvPr id="9" name="Text 7"/>
+          <p:cNvSpPr txBox="1"/>
+          <p:nvPr/>
+        </p:nvSpPr>
+        <p:spPr>
+          <a:xfrm>
+            <a:off x="640080" y="3063240"/>
+            <a:ext cx="1325880" cy="438912"/>
+          </a:xfrm>
+          <a:prstGeom prst="rect">
+            <a:avLst/>
+          </a:prstGeom>
+          <a:noFill/>
+          <a:ln/>
+        </p:spPr>
+        <p:txBody>
+          <a:bodyPr wrap="square" lIns="0" tIns="0" rIns="0" bIns="0" rtlCol="0" anchor="t"/>
+          <a:lstStyle/>
+          <a:p>
+            <a:pPr indent="0" marL="0">
+              <a:buNone/>
+            </a:pPr>
+            <a:r>
+              <a:rPr lang="en-US" sz="1050" b="1" dirty="0">
+                <a:solidFill>
+                  <a:srgbClr val="FFFFFF"/>
+                </a:solidFill>
+                <a:latin typeface="Calibri" pitchFamily="34" charset="0"/>
+                <a:ea typeface="Calibri" pitchFamily="34" charset="-122"/>
+                <a:cs typeface="Calibri" pitchFamily="34" charset="-120"/>
+              </a:rPr>
+              <a:t>rein</a:t>
+            </a:r>
+            <a:endParaRPr lang="en-US" sz="1050" dirty="0"/>
+          </a:p>
+        </p:txBody>
+      </p:sp>
+      <p:sp>
+        <p:nvSpPr>
+          <p:cNvPr id="10" name="Text 8"/>
+          <p:cNvSpPr txBox="1"/>
+          <p:nvPr/>
+        </p:nvSpPr>
+        <p:spPr>
+          <a:xfrm>
+            <a:off x="2011680" y="3063240"/>
+            <a:ext cx="3200400" cy="438912"/>
+          </a:xfrm>
+          <a:prstGeom prst="rect">
+            <a:avLst/>
+          </a:prstGeom>
+          <a:noFill/>
+          <a:ln/>
+        </p:spPr>
+        <p:txBody>
+          <a:bodyPr wrap="square" lIns="0" tIns="0" rIns="0" bIns="0" rtlCol="0" anchor="t"/>
+          <a:lstStyle/>
+          <a:p>
+            <a:pPr indent="0" marL="0">
+              <a:buNone/>
+            </a:pPr>
+            <a:r>
+              <a:rPr lang="en-US" sz="950" dirty="0">
+                <a:solidFill>
+                  <a:srgbClr val="C3C2B7"/>
+                </a:solidFill>
+                <a:latin typeface="Calibri" pitchFamily="34" charset="0"/>
+                <a:ea typeface="Calibri" pitchFamily="34" charset="-122"/>
+                <a:cs typeface="Calibri" pitchFamily="34" charset="-120"/>
+              </a:rPr>
+              <a:t>A smart account an agent can operate and cannot drain. Verified source; six attacks lost nothing. 46 tests.</a:t>
+            </a:r>
+            <a:endParaRPr lang="en-US" sz="950" dirty="0"/>
+          </a:p>
+        </p:txBody>
+      </p:sp>
+      <p:sp>
+        <p:nvSpPr>
+          <p:cNvPr id="11" name="Text 9"/>
+          <p:cNvSpPr txBox="1"/>
+          <p:nvPr/>
+        </p:nvSpPr>
+        <p:spPr>
+          <a:xfrm>
+            <a:off x="640080" y="3520440"/>
+            <a:ext cx="1325880" cy="438912"/>
+          </a:xfrm>
+          <a:prstGeom prst="rect">
+            <a:avLst/>
+          </a:prstGeom>
+          <a:noFill/>
+          <a:ln/>
+        </p:spPr>
+        <p:txBody>
+          <a:bodyPr wrap="square" lIns="0" tIns="0" rIns="0" bIns="0" rtlCol="0" anchor="t"/>
+          <a:lstStyle/>
+          <a:p>
+            <a:pPr indent="0" marL="0">
+              <a:buNone/>
+            </a:pPr>
+            <a:r>
+              <a:rPr lang="en-US" sz="1050" b="1" dirty="0">
+                <a:solidFill>
+                  <a:srgbClr val="FFB38A"/>
+                </a:solidFill>
+                <a:latin typeface="Calibri" pitchFamily="34" charset="0"/>
+                <a:ea typeface="Calibri" pitchFamily="34" charset="-122"/>
+                <a:cs typeface="Calibri" pitchFamily="34" charset="-120"/>
+              </a:rPr>
+              <a:t>proofflow</a:t>
+            </a:r>
+            <a:endParaRPr lang="en-US" sz="1050" dirty="0"/>
+          </a:p>
+        </p:txBody>
+      </p:sp>
+      <p:sp>
+        <p:nvSpPr>
+          <p:cNvPr id="12" name="Text 10"/>
+          <p:cNvSpPr txBox="1"/>
+          <p:nvPr/>
+        </p:nvSpPr>
+        <p:spPr>
+          <a:xfrm>
+            <a:off x="2011680" y="3520440"/>
+            <a:ext cx="3200400" cy="438912"/>
+          </a:xfrm>
+          <a:prstGeom prst="rect">
+            <a:avLst/>
+          </a:prstGeom>
+          <a:noFill/>
+          <a:ln/>
+        </p:spPr>
+        <p:txBody>
+          <a:bodyPr wrap="square" lIns="0" tIns="0" rIns="0" bIns="0" rtlCol="0" anchor="t"/>
+          <a:lstStyle/>
+          <a:p>
+            <a:pPr indent="0" marL="0">
+              <a:buNone/>
+            </a:pPr>
+            <a:r>
+              <a:rPr lang="en-US" sz="950" dirty="0">
+                <a:solidFill>
+                  <a:srgbClr val="C3C2B7"/>
+                </a:solidFill>
+                <a:latin typeface="Calibri" pitchFamily="34" charset="0"/>
+                <a:ea typeface="Calibri" pitchFamily="34" charset="-122"/>
+                <a:cs typeface="Calibri" pitchFamily="34" charset="-120"/>
+              </a:rPr>
+              <a:t>Revenue-based credit for emerging-market SMBs on Solana, built on USDC and CCTP, Arcium MPC. Live.</a:t>
+            </a:r>
+            <a:endParaRPr lang="en-US" sz="950" dirty="0"/>
+          </a:p>
+        </p:txBody>
+      </p:sp>
+      <p:sp>
+        <p:nvSpPr>
+          <p:cNvPr id="13" name="Text 11"/>
+          <p:cNvSpPr txBox="1"/>
+          <p:nvPr/>
+        </p:nvSpPr>
+        <p:spPr>
+          <a:xfrm>
+            <a:off x="640080" y="3977640"/>
+            <a:ext cx="1325880" cy="438912"/>
+          </a:xfrm>
+          <a:prstGeom prst="rect">
+            <a:avLst/>
+          </a:prstGeom>
+          <a:noFill/>
+          <a:ln/>
+        </p:spPr>
+        <p:txBody>
+          <a:bodyPr wrap="square" lIns="0" tIns="0" rIns="0" bIns="0" rtlCol="0" anchor="t"/>
+          <a:lstStyle/>
+          <a:p>
+            <a:pPr indent="0" marL="0">
+              <a:buNone/>
+            </a:pPr>
+            <a:r>
+              <a:rPr lang="en-US" sz="1050" b="1" dirty="0">
+                <a:solidFill>
+                  <a:srgbClr val="FFB38A"/>
+                </a:solidFill>
+                <a:latin typeface="Calibri" pitchFamily="34" charset="0"/>
+                <a:ea typeface="Calibri" pitchFamily="34" charset="-122"/>
+                <a:cs typeface="Calibri" pitchFamily="34" charset="-120"/>
+              </a:rPr>
+              <a:t>economic-immune-system</a:t>
+            </a:r>
+            <a:endParaRPr lang="en-US" sz="1050" dirty="0"/>
+          </a:p>
+        </p:txBody>
+      </p:sp>
+      <p:sp>
+        <p:nvSpPr>
+          <p:cNvPr id="14" name="Text 12"/>
+          <p:cNvSpPr txBox="1"/>
+          <p:nvPr/>
+        </p:nvSpPr>
+        <p:spPr>
+          <a:xfrm>
+            <a:off x="2011680" y="3977640"/>
+            <a:ext cx="3200400" cy="438912"/>
+          </a:xfrm>
+          <a:prstGeom prst="rect">
+            <a:avLst/>
+          </a:prstGeom>
+          <a:noFill/>
+          <a:ln/>
+        </p:spPr>
+        <p:txBody>
+          <a:bodyPr wrap="square" lIns="0" tIns="0" rIns="0" bIns="0" rtlCol="0" anchor="t"/>
+          <a:lstStyle/>
+          <a:p>
+            <a:pPr indent="0" marL="0">
+              <a:buNone/>
+            </a:pPr>
+            <a:r>
+              <a:rPr lang="en-US" sz="950" dirty="0">
+                <a:solidFill>
+                  <a:srgbClr val="C3C2B7"/>
+                </a:solidFill>
+                <a:latin typeface="Calibri" pitchFamily="34" charset="0"/>
+                <a:ea typeface="Calibri" pitchFamily="34" charset="-122"/>
+                <a:cs typeface="Calibri" pitchFamily="34" charset="-120"/>
+              </a:rPr>
+              <a:t>Transaction authorisation against a budget policy, built on Circle Developer Controlled Wallets.</a:t>
+            </a:r>
+            <a:endParaRPr lang="en-US" sz="950" dirty="0"/>
+          </a:p>
+        </p:txBody>
+      </p:sp>
+      <p:sp>
+        <p:nvSpPr>
+          <p:cNvPr id="15" name="Text 13"/>
+          <p:cNvSpPr txBox="1"/>
+          <p:nvPr/>
+        </p:nvSpPr>
+        <p:spPr>
+          <a:xfrm>
+            <a:off x="640080" y="4434840"/>
+            <a:ext cx="4572000" cy="365760"/>
+          </a:xfrm>
+          <a:prstGeom prst="rect">
+            <a:avLst/>
+          </a:prstGeom>
+          <a:noFill/>
+          <a:ln/>
+        </p:spPr>
+        <p:txBody>
+          <a:bodyPr wrap="square" lIns="0" tIns="0" rIns="0" bIns="0" rtlCol="0" anchor="t"/>
+          <a:lstStyle/>
+          <a:p>
+            <a:pPr indent="0" marL="0">
+              <a:buNone/>
+            </a:pPr>
+            <a:r>
+              <a:rPr lang="en-US" sz="900" i="1" dirty="0">
+                <a:solidFill>
+                  <a:srgbClr val="8D8B82"/>
+                </a:solidFill>
+                <a:latin typeface="Calibri" pitchFamily="34" charset="0"/>
+                <a:ea typeface="Calibri" pitchFamily="34" charset="-122"/>
+                <a:cs typeface="Calibri" pitchFamily="34" charset="-120"/>
+              </a:rPr>
+              <a:t>So CCTP and Circle Wallets, marked planned in the milestones, are products I have already shipped with. What is new is Arc, and the primitive Arc is missing.</a:t>
+            </a:r>
+            <a:endParaRPr lang="en-US" sz="900" dirty="0"/>
+          </a:p>
+        </p:txBody>
+      </p:sp>
+      <p:sp>
+        <p:nvSpPr>
+          <p:cNvPr id="16" name="Text 14"/>
+          <p:cNvSpPr txBox="1"/>
+          <p:nvPr/>
+        </p:nvSpPr>
+        <p:spPr>
+          <a:xfrm>
+            <a:off x="5577840" y="1874520"/>
+            <a:ext cx="2926080" cy="228600"/>
+          </a:xfrm>
+          <a:prstGeom prst="rect">
+            <a:avLst/>
+          </a:prstGeom>
+          <a:noFill/>
+          <a:ln/>
+        </p:spPr>
+        <p:txBody>
+          <a:bodyPr wrap="square" lIns="0" tIns="0" rIns="0" bIns="0" rtlCol="0" anchor="ctr"/>
+          <a:lstStyle/>
+          <a:p>
+            <a:pPr indent="0" marL="0">
+              <a:buNone/>
+            </a:pPr>
+            <a:r>
+              <a:rPr lang="en-US" sz="950" b="1" spc="300" kern="0" dirty="0">
+                <a:solidFill>
+                  <a:srgbClr val="6B6A64"/>
+                </a:solidFill>
+                <a:latin typeface="Calibri" pitchFamily="34" charset="0"/>
+                <a:ea typeface="Calibri" pitchFamily="34" charset="-122"/>
+                <a:cs typeface="Calibri" pitchFamily="34" charset="-120"/>
+              </a:rPr>
+              <a:t>RIALTO · NINE DAYS · ONE PERSON</a:t>
+            </a:r>
+            <a:endParaRPr lang="en-US" sz="950" dirty="0"/>
+          </a:p>
+        </p:txBody>
+      </p:sp>
+      <p:sp>
+        <p:nvSpPr>
+          <p:cNvPr id="17" name="Text 15"/>
+          <p:cNvSpPr txBox="1"/>
+          <p:nvPr/>
+        </p:nvSpPr>
+        <p:spPr>
+          <a:xfrm>
+            <a:off x="5577840" y="2148840"/>
+            <a:ext cx="1463040" cy="365760"/>
+          </a:xfrm>
+          <a:prstGeom prst="rect">
+            <a:avLst/>
+          </a:prstGeom>
+          <a:noFill/>
+          <a:ln/>
+        </p:spPr>
+        <p:txBody>
+          <a:bodyPr wrap="square" lIns="0" tIns="0" rIns="0" bIns="0" rtlCol="0" anchor="ctr"/>
+          <a:lstStyle/>
+          <a:p>
+            <a:pPr indent="0" marL="0">
+              <a:buNone/>
+            </a:pPr>
+            <a:r>
+              <a:rPr lang="en-US" sz="2000" b="1" dirty="0">
                 <a:solidFill>
                   <a:srgbClr val="FFFFFF"/>
                 </a:solidFill>
@@ -4307,22 +4814,22 @@
                 <a:ea typeface="Arial" pitchFamily="34" charset="-122"/>
                 <a:cs typeface="Arial" pitchFamily="34" charset="-120"/>
               </a:rPr>
-              <a:t>Germline</a:t>
-            </a:r>
-            <a:endParaRPr lang="en-US" sz="1700" dirty="0"/>
-          </a:p>
-        </p:txBody>
-      </p:sp>
-      <p:sp>
-        <p:nvSpPr>
-          <p:cNvPr id="5" name="Text 3"/>
-          <p:cNvSpPr txBox="1"/>
-          <p:nvPr/>
-        </p:nvSpPr>
-        <p:spPr>
-          <a:xfrm>
-            <a:off x="640080" y="3172968"/>
-            <a:ext cx="3840480" cy="502920"/>
+              <a:t>6</a:t>
+            </a:r>
+            <a:endParaRPr lang="en-US" sz="2000" dirty="0"/>
+          </a:p>
+        </p:txBody>
+      </p:sp>
+      <p:sp>
+        <p:nvSpPr>
+          <p:cNvPr id="18" name="Text 16"/>
+          <p:cNvSpPr txBox="1"/>
+          <p:nvPr/>
+        </p:nvSpPr>
+        <p:spPr>
+          <a:xfrm>
+            <a:off x="5577840" y="2514600"/>
+            <a:ext cx="1463040" cy="365760"/>
           </a:xfrm>
           <a:prstGeom prst="rect">
             <a:avLst/>
@@ -4338,7 +4845,7 @@
               <a:buNone/>
             </a:pPr>
             <a:r>
-              <a:rPr lang="en-US" sz="1050" dirty="0">
+              <a:rPr lang="en-US" sz="850" dirty="0">
                 <a:solidFill>
                   <a:srgbClr val="8D8B82"/>
                 </a:solidFill>
@@ -4346,22 +4853,22 @@
                 <a:ea typeface="Calibri" pitchFamily="34" charset="-122"/>
                 <a:cs typeface="Calibri" pitchFamily="34" charset="-120"/>
               </a:rPr>
-              <a:t>Verifiable AI-configuration tuning, live on 0G mainnet — every step recorded on-chain.</a:t>
-            </a:r>
-            <a:endParaRPr lang="en-US" sz="1050" dirty="0"/>
-          </a:p>
-        </p:txBody>
-      </p:sp>
-      <p:sp>
-        <p:nvSpPr>
-          <p:cNvPr id="6" name="Text 4"/>
-          <p:cNvSpPr txBox="1"/>
-          <p:nvPr/>
-        </p:nvSpPr>
-        <p:spPr>
-          <a:xfrm>
-            <a:off x="4709160" y="2788920"/>
-            <a:ext cx="3840480" cy="384048"/>
+              <a:t>contracts, source-verified on Arc</a:t>
+            </a:r>
+            <a:endParaRPr lang="en-US" sz="850" dirty="0"/>
+          </a:p>
+        </p:txBody>
+      </p:sp>
+      <p:sp>
+        <p:nvSpPr>
+          <p:cNvPr id="19" name="Text 17"/>
+          <p:cNvSpPr txBox="1"/>
+          <p:nvPr/>
+        </p:nvSpPr>
+        <p:spPr>
+          <a:xfrm>
+            <a:off x="7086600" y="2148840"/>
+            <a:ext cx="1463040" cy="365760"/>
           </a:xfrm>
           <a:prstGeom prst="rect">
             <a:avLst/>
@@ -4377,7 +4884,7 @@
               <a:buNone/>
             </a:pPr>
             <a:r>
-              <a:rPr lang="en-US" sz="1700" b="1" dirty="0">
+              <a:rPr lang="en-US" sz="2000" b="1" dirty="0">
                 <a:solidFill>
                   <a:srgbClr val="FFFFFF"/>
                 </a:solidFill>
@@ -4385,22 +4892,22 @@
                 <a:ea typeface="Arial" pitchFamily="34" charset="-122"/>
                 <a:cs typeface="Arial" pitchFamily="34" charset="-120"/>
               </a:rPr>
-              <a:t>BIP 360 conformance</a:t>
-            </a:r>
-            <a:endParaRPr lang="en-US" sz="1700" dirty="0"/>
-          </a:p>
-        </p:txBody>
-      </p:sp>
-      <p:sp>
-        <p:nvSpPr>
-          <p:cNvPr id="7" name="Text 5"/>
-          <p:cNvSpPr txBox="1"/>
-          <p:nvPr/>
-        </p:nvSpPr>
-        <p:spPr>
-          <a:xfrm>
-            <a:off x="4709160" y="3172968"/>
-            <a:ext cx="3840480" cy="502920"/>
+              <a:t>71</a:t>
+            </a:r>
+            <a:endParaRPr lang="en-US" sz="2000" dirty="0"/>
+          </a:p>
+        </p:txBody>
+      </p:sp>
+      <p:sp>
+        <p:nvSpPr>
+          <p:cNvPr id="20" name="Text 18"/>
+          <p:cNvSpPr txBox="1"/>
+          <p:nvPr/>
+        </p:nvSpPr>
+        <p:spPr>
+          <a:xfrm>
+            <a:off x="7086600" y="2514600"/>
+            <a:ext cx="1463040" cy="365760"/>
           </a:xfrm>
           <a:prstGeom prst="rect">
             <a:avLst/>
@@ -4416,7 +4923,7 @@
               <a:buNone/>
             </a:pPr>
             <a:r>
-              <a:rPr lang="en-US" sz="1050" dirty="0">
+              <a:rPr lang="en-US" sz="850" dirty="0">
                 <a:solidFill>
                   <a:srgbClr val="8D8B82"/>
                 </a:solidFill>
@@ -4424,22 +4931,22 @@
                 <a:ea typeface="Calibri" pitchFamily="34" charset="-122"/>
                 <a:cs typeface="Calibri" pitchFamily="34" charset="-120"/>
               </a:rPr>
-              <a:t>From-scratch implementation vs the official reference: 13 vectors, 2,000 random trees, two real gaps found in the reference.</a:t>
-            </a:r>
-            <a:endParaRPr lang="en-US" sz="1050" dirty="0"/>
-          </a:p>
-        </p:txBody>
-      </p:sp>
-      <p:sp>
-        <p:nvSpPr>
-          <p:cNvPr id="8" name="Text 6"/>
-          <p:cNvSpPr txBox="1"/>
-          <p:nvPr/>
-        </p:nvSpPr>
-        <p:spPr>
-          <a:xfrm>
-            <a:off x="640080" y="3703320"/>
-            <a:ext cx="3840480" cy="384048"/>
+              <a:t>passing tests</a:t>
+            </a:r>
+            <a:endParaRPr lang="en-US" sz="850" dirty="0"/>
+          </a:p>
+        </p:txBody>
+      </p:sp>
+      <p:sp>
+        <p:nvSpPr>
+          <p:cNvPr id="21" name="Text 19"/>
+          <p:cNvSpPr txBox="1"/>
+          <p:nvPr/>
+        </p:nvSpPr>
+        <p:spPr>
+          <a:xfrm>
+            <a:off x="5577840" y="2898648"/>
+            <a:ext cx="1463040" cy="365760"/>
           </a:xfrm>
           <a:prstGeom prst="rect">
             <a:avLst/>
@@ -4455,7 +4962,7 @@
               <a:buNone/>
             </a:pPr>
             <a:r>
-              <a:rPr lang="en-US" sz="1700" b="1" dirty="0">
+              <a:rPr lang="en-US" sz="2000" b="1" dirty="0">
                 <a:solidFill>
                   <a:srgbClr val="FFFFFF"/>
                 </a:solidFill>
@@ -4463,22 +4970,22 @@
                 <a:ea typeface="Arial" pitchFamily="34" charset="-122"/>
                 <a:cs typeface="Arial" pitchFamily="34" charset="-120"/>
               </a:rPr>
-              <a:t>USDC/CCTP · Circle Wallets</a:t>
-            </a:r>
-            <a:endParaRPr lang="en-US" sz="1700" dirty="0"/>
-          </a:p>
-        </p:txBody>
-      </p:sp>
-      <p:sp>
-        <p:nvSpPr>
-          <p:cNvPr id="9" name="Text 7"/>
-          <p:cNvSpPr txBox="1"/>
-          <p:nvPr/>
-        </p:nvSpPr>
-        <p:spPr>
-          <a:xfrm>
-            <a:off x="640080" y="4087368"/>
-            <a:ext cx="3840480" cy="502920"/>
+              <a:t>259</a:t>
+            </a:r>
+            <a:endParaRPr lang="en-US" sz="2000" dirty="0"/>
+          </a:p>
+        </p:txBody>
+      </p:sp>
+      <p:sp>
+        <p:nvSpPr>
+          <p:cNvPr id="22" name="Text 20"/>
+          <p:cNvSpPr txBox="1"/>
+          <p:nvPr/>
+        </p:nvSpPr>
+        <p:spPr>
+          <a:xfrm>
+            <a:off x="5577840" y="3264408"/>
+            <a:ext cx="1463040" cy="365760"/>
           </a:xfrm>
           <a:prstGeom prst="rect">
             <a:avLst/>
@@ -4494,7 +5001,7 @@
               <a:buNone/>
             </a:pPr>
             <a:r>
-              <a:rPr lang="en-US" sz="1050" dirty="0">
+              <a:rPr lang="en-US" sz="850" dirty="0">
                 <a:solidFill>
                   <a:srgbClr val="8D8B82"/>
                 </a:solidFill>
@@ -4502,22 +5009,22 @@
                 <a:ea typeface="Calibri" pitchFamily="34" charset="-122"/>
                 <a:cs typeface="Calibri" pitchFamily="34" charset="-120"/>
               </a:rPr>
-              <a:t>Already shipped: proofflow (USDC, CCTP, Arcium MPC, live) and an agent on Circle Developer Controlled Wallets.</a:t>
-            </a:r>
-            <a:endParaRPr lang="en-US" sz="1050" dirty="0"/>
-          </a:p>
-        </p:txBody>
-      </p:sp>
-      <p:sp>
-        <p:nvSpPr>
-          <p:cNvPr id="10" name="Text 8"/>
-          <p:cNvSpPr txBox="1"/>
-          <p:nvPr/>
-        </p:nvSpPr>
-        <p:spPr>
-          <a:xfrm>
-            <a:off x="4709160" y="3703320"/>
-            <a:ext cx="3840480" cy="384048"/>
+              <a:t>days of ECB data, six corridors</a:t>
+            </a:r>
+            <a:endParaRPr lang="en-US" sz="850" dirty="0"/>
+          </a:p>
+        </p:txBody>
+      </p:sp>
+      <p:sp>
+        <p:nvSpPr>
+          <p:cNvPr id="23" name="Text 21"/>
+          <p:cNvSpPr txBox="1"/>
+          <p:nvPr/>
+        </p:nvSpPr>
+        <p:spPr>
+          <a:xfrm>
+            <a:off x="7086600" y="2898648"/>
+            <a:ext cx="1463040" cy="365760"/>
           </a:xfrm>
           <a:prstGeom prst="rect">
             <a:avLst/>
@@ -4533,30 +5040,30 @@
               <a:buNone/>
             </a:pPr>
             <a:r>
-              <a:rPr lang="en-US" sz="1700" b="1" dirty="0">
-                <a:solidFill>
-                  <a:srgbClr val="FFFFFF"/>
+              <a:rPr lang="en-US" sz="2000" b="1" dirty="0">
+                <a:solidFill>
+                  <a:srgbClr val="1BAF7A"/>
                 </a:solidFill>
                 <a:latin typeface="Arial" pitchFamily="34" charset="0"/>
                 <a:ea typeface="Arial" pitchFamily="34" charset="-122"/>
                 <a:cs typeface="Arial" pitchFamily="34" charset="-120"/>
               </a:rPr>
-              <a:t>Rialto, nine days</a:t>
-            </a:r>
-            <a:endParaRPr lang="en-US" sz="1700" dirty="0"/>
-          </a:p>
-        </p:txBody>
-      </p:sp>
-      <p:sp>
-        <p:nvSpPr>
-          <p:cNvPr id="11" name="Text 9"/>
-          <p:cNvSpPr txBox="1"/>
-          <p:nvPr/>
-        </p:nvSpPr>
-        <p:spPr>
-          <a:xfrm>
-            <a:off x="4709160" y="4087368"/>
-            <a:ext cx="3840480" cy="502920"/>
+              <a:t>37.8→3.2%</a:t>
+            </a:r>
+            <a:endParaRPr lang="en-US" sz="2000" dirty="0"/>
+          </a:p>
+        </p:txBody>
+      </p:sp>
+      <p:sp>
+        <p:nvSpPr>
+          <p:cNvPr id="24" name="Text 22"/>
+          <p:cNvSpPr txBox="1"/>
+          <p:nvPr/>
+        </p:nvSpPr>
+        <p:spPr>
+          <a:xfrm>
+            <a:off x="7086600" y="3264408"/>
+            <a:ext cx="1463040" cy="365760"/>
           </a:xfrm>
           <a:prstGeom prst="rect">
             <a:avLst/>
@@ -4572,7 +5079,7 @@
               <a:buNone/>
             </a:pPr>
             <a:r>
-              <a:rPr lang="en-US" sz="1050" dirty="0">
+              <a:rPr lang="en-US" sz="850" dirty="0">
                 <a:solidFill>
                   <a:srgbClr val="8D8B82"/>
                 </a:solidFill>
@@ -4580,22 +5087,22 @@
                 <a:ea typeface="Calibri" pitchFamily="34" charset="-122"/>
                 <a:cs typeface="Calibri" pitchFamily="34" charset="-120"/>
               </a:rPr>
-              <a:t>Six verified contracts, 71 tests, a 259-day backtest, an adversarial review, a settled invoice and forward, a demo video.</a:t>
-            </a:r>
-            <a:endParaRPr lang="en-US" sz="1050" dirty="0"/>
-          </a:p>
-        </p:txBody>
-      </p:sp>
-      <p:sp>
-        <p:nvSpPr>
-          <p:cNvPr id="12" name="Text 10"/>
-          <p:cNvSpPr txBox="1"/>
-          <p:nvPr/>
-        </p:nvSpPr>
-        <p:spPr>
-          <a:xfrm>
-            <a:off x="640080" y="4572000"/>
-            <a:ext cx="7863840" cy="320040"/>
+              <a:t>oracle failure mode, found and bounded</a:t>
+            </a:r>
+            <a:endParaRPr lang="en-US" sz="850" dirty="0"/>
+          </a:p>
+        </p:txBody>
+      </p:sp>
+      <p:sp>
+        <p:nvSpPr>
+          <p:cNvPr id="25" name="Text 23"/>
+          <p:cNvSpPr txBox="1"/>
+          <p:nvPr/>
+        </p:nvSpPr>
+        <p:spPr>
+          <a:xfrm>
+            <a:off x="5577840" y="3648456"/>
+            <a:ext cx="1463040" cy="365760"/>
           </a:xfrm>
           <a:prstGeom prst="rect">
             <a:avLst/>
@@ -4611,7 +5118,163 @@
               <a:buNone/>
             </a:pPr>
             <a:r>
-              <a:rPr lang="en-US" sz="1050" dirty="0">
+              <a:rPr lang="en-US" sz="2000" b="1" dirty="0">
+                <a:solidFill>
+                  <a:srgbClr val="1BAF7A"/>
+                </a:solidFill>
+                <a:latin typeface="Arial" pitchFamily="34" charset="0"/>
+                <a:ea typeface="Arial" pitchFamily="34" charset="-122"/>
+                <a:cs typeface="Arial" pitchFamily="34" charset="-120"/>
+              </a:rPr>
+              <a:t>1 + 1</a:t>
+            </a:r>
+            <a:endParaRPr lang="en-US" sz="2000" dirty="0"/>
+          </a:p>
+        </p:txBody>
+      </p:sp>
+      <p:sp>
+        <p:nvSpPr>
+          <p:cNvPr id="26" name="Text 24"/>
+          <p:cNvSpPr txBox="1"/>
+          <p:nvPr/>
+        </p:nvSpPr>
+        <p:spPr>
+          <a:xfrm>
+            <a:off x="5577840" y="4014216"/>
+            <a:ext cx="1463040" cy="365760"/>
+          </a:xfrm>
+          <a:prstGeom prst="rect">
+            <a:avLst/>
+          </a:prstGeom>
+          <a:noFill/>
+          <a:ln/>
+        </p:spPr>
+        <p:txBody>
+          <a:bodyPr wrap="square" lIns="0" tIns="0" rIns="0" bIns="0" rtlCol="0" anchor="t"/>
+          <a:lstStyle/>
+          <a:p>
+            <a:pPr indent="0" marL="0">
+              <a:buNone/>
+            </a:pPr>
+            <a:r>
+              <a:rPr lang="en-US" sz="850" dirty="0">
+                <a:solidFill>
+                  <a:srgbClr val="8D8B82"/>
+                </a:solidFill>
+                <a:latin typeface="Calibri" pitchFamily="34" charset="0"/>
+                <a:ea typeface="Calibri" pitchFamily="34" charset="-122"/>
+                <a:cs typeface="Calibri" pitchFamily="34" charset="-120"/>
+              </a:rPr>
+              <a:t>invoice and forward, settled on-chain</a:t>
+            </a:r>
+            <a:endParaRPr lang="en-US" sz="850" dirty="0"/>
+          </a:p>
+        </p:txBody>
+      </p:sp>
+      <p:sp>
+        <p:nvSpPr>
+          <p:cNvPr id="27" name="Text 25"/>
+          <p:cNvSpPr txBox="1"/>
+          <p:nvPr/>
+        </p:nvSpPr>
+        <p:spPr>
+          <a:xfrm>
+            <a:off x="7086600" y="3648456"/>
+            <a:ext cx="1463040" cy="365760"/>
+          </a:xfrm>
+          <a:prstGeom prst="rect">
+            <a:avLst/>
+          </a:prstGeom>
+          <a:noFill/>
+          <a:ln/>
+        </p:spPr>
+        <p:txBody>
+          <a:bodyPr wrap="square" lIns="0" tIns="0" rIns="0" bIns="0" rtlCol="0" anchor="ctr"/>
+          <a:lstStyle/>
+          <a:p>
+            <a:pPr indent="0" marL="0">
+              <a:buNone/>
+            </a:pPr>
+            <a:r>
+              <a:rPr lang="en-US" sz="2000" b="1" dirty="0">
+                <a:solidFill>
+                  <a:srgbClr val="FFFFFF"/>
+                </a:solidFill>
+                <a:latin typeface="Arial" pitchFamily="34" charset="0"/>
+                <a:ea typeface="Arial" pitchFamily="34" charset="-122"/>
+                <a:cs typeface="Arial" pitchFamily="34" charset="-120"/>
+              </a:rPr>
+              <a:t>4:34</a:t>
+            </a:r>
+            <a:endParaRPr lang="en-US" sz="2000" dirty="0"/>
+          </a:p>
+        </p:txBody>
+      </p:sp>
+      <p:sp>
+        <p:nvSpPr>
+          <p:cNvPr id="28" name="Text 26"/>
+          <p:cNvSpPr txBox="1"/>
+          <p:nvPr/>
+        </p:nvSpPr>
+        <p:spPr>
+          <a:xfrm>
+            <a:off x="7086600" y="4014216"/>
+            <a:ext cx="1463040" cy="365760"/>
+          </a:xfrm>
+          <a:prstGeom prst="rect">
+            <a:avLst/>
+          </a:prstGeom>
+          <a:noFill/>
+          <a:ln/>
+        </p:spPr>
+        <p:txBody>
+          <a:bodyPr wrap="square" lIns="0" tIns="0" rIns="0" bIns="0" rtlCol="0" anchor="t"/>
+          <a:lstStyle/>
+          <a:p>
+            <a:pPr indent="0" marL="0">
+              <a:buNone/>
+            </a:pPr>
+            <a:r>
+              <a:rPr lang="en-US" sz="850" dirty="0">
+                <a:solidFill>
+                  <a:srgbClr val="8D8B82"/>
+                </a:solidFill>
+                <a:latin typeface="Calibri" pitchFamily="34" charset="0"/>
+                <a:ea typeface="Calibri" pitchFamily="34" charset="-122"/>
+                <a:cs typeface="Calibri" pitchFamily="34" charset="-120"/>
+              </a:rPr>
+              <a:t>demo video, reproducible from the repo</a:t>
+            </a:r>
+            <a:endParaRPr lang="en-US" sz="850" dirty="0"/>
+          </a:p>
+        </p:txBody>
+      </p:sp>
+      <p:sp>
+        <p:nvSpPr>
+          <p:cNvPr id="29" name="Text 27"/>
+          <p:cNvSpPr txBox="1"/>
+          <p:nvPr/>
+        </p:nvSpPr>
+        <p:spPr>
+          <a:xfrm>
+            <a:off x="640080" y="4709160"/>
+            <a:ext cx="7863840" cy="274320"/>
+          </a:xfrm>
+          <a:prstGeom prst="rect">
+            <a:avLst/>
+          </a:prstGeom>
+          <a:noFill/>
+          <a:ln/>
+        </p:spPr>
+        <p:txBody>
+          <a:bodyPr wrap="square" lIns="0" tIns="0" rIns="0" bIns="0" rtlCol="0" anchor="ctr"/>
+          <a:lstStyle/>
+          <a:p>
+            <a:pPr indent="0" marL="0">
+              <a:buNone/>
+            </a:pPr>
+            <a:r>
+              <a:rPr lang="en-US" sz="1000" dirty="0">
                 <a:solidFill>
                   <a:srgbClr val="8D8B82"/>
                 </a:solidFill>
@@ -4621,7 +5284,7 @@
               </a:rPr>
               <a:t>github.com/let-the-dreamers-rise · 123 repositories · 901 contributions in the last year · rialto-arc.netlify.app</a:t>
             </a:r>
-            <a:endParaRPr lang="en-US" sz="1050" dirty="0"/>
+            <a:endParaRPr lang="en-US" sz="1000" dirty="0"/>
           </a:p>
         </p:txBody>
       </p:sp>
